--- a/docs/UI_Performance_Framework_Presentation.pptx
+++ b/docs/UI_Performance_Framework_Presentation.pptx
@@ -7147,7 +7147,7 @@
                 <a:ea typeface="Arial" pitchFamily="34" charset="-122"/>
                 <a:cs typeface="Arial" pitchFamily="34" charset="-120"/>
               </a:rPr>
-              <a:t>Automated pass/fail gating with 3-of-5 quorum</a:t>
+              <a:t>Automated pass/fail gating with configurable quorum</a:t>
             </a:r>
             <a:endParaRPr lang="en-US" sz="1600" dirty="0"/>
           </a:p>
@@ -8345,7 +8345,7 @@
                 <a:ea typeface="Arial" pitchFamily="34" charset="-122"/>
                 <a:cs typeface="Arial" pitchFamily="34" charset="-120"/>
               </a:rPr>
-              <a:t>Gating Strategy: 3-of-5 Quorum</a:t>
+              <a:t>Gating Strategy: Configurable Quorum</a:t>
             </a:r>
             <a:endParaRPr lang="en-US" sz="2400" dirty="0"/>
           </a:p>
@@ -8408,7 +8408,7 @@
                 <a:ea typeface="Arial" pitchFamily="34" charset="-122"/>
                 <a:cs typeface="Arial" pitchFamily="34" charset="-120"/>
               </a:rPr>
-              <a:t>A metric must fail 3 of the last 5 runs to trigger a gate failure</a:t>
+              <a:t>Default: 3-of-5 — a metric must fail 3 of the last 5 runs to trigger</a:t>
             </a:r>
             <a:endParaRPr lang="en-US" sz="1400" dirty="0"/>
           </a:p>
@@ -8429,7 +8429,7 @@
                 <a:ea typeface="Arial" pitchFamily="34" charset="-122"/>
                 <a:cs typeface="Arial" pitchFamily="34" charset="-120"/>
               </a:rPr>
-              <a:t>Prevents flaky, one-off regressions from blocking pipelines</a:t>
+              <a:t>Per-severity defaults: warn/advisory = 1-of-3, block = 3-of-5, page = 4-of-5</a:t>
             </a:r>
             <a:endParaRPr lang="en-US" sz="1400" dirty="0"/>
           </a:p>
@@ -8450,7 +8450,28 @@
                 <a:ea typeface="Arial" pitchFamily="34" charset="-122"/>
                 <a:cs typeface="Arial" pitchFamily="34" charset="-120"/>
               </a:rPr>
-              <a:t>Gates are evaluated per-run and results stored with the run</a:t>
+              <a:t>Gate-level overrides for window_size and required_failures</a:t>
+            </a:r>
+            <a:endParaRPr lang="en-US" sz="1400" dirty="0"/>
+          </a:p>
+          <a:p>
+            <a:pPr marL="342900" indent="-342900">
+              <a:spcAft>
+                <a:spcPts val="600"/>
+              </a:spcAft>
+              <a:buSzPct val="100000"/>
+              <a:buChar char="•"/>
+            </a:pPr>
+            <a:r>
+              <a:rPr lang="en-US" sz="1400" dirty="0">
+                <a:solidFill>
+                  <a:srgbClr val="94A3B8"/>
+                </a:solidFill>
+                <a:latin typeface="Arial" pitchFamily="34" charset="0"/>
+                <a:ea typeface="Arial" pitchFamily="34" charset="-122"/>
+                <a:cs typeface="Arial" pitchFamily="34" charset="-120"/>
+              </a:rPr>
+              <a:t>Gate overrides with audit trail — engineers can acknowledge and proceed</a:t>
             </a:r>
             <a:endParaRPr lang="en-US" sz="1400" dirty="0"/>
           </a:p>
@@ -8472,6 +8493,27 @@
                 <a:cs typeface="Arial" pitchFamily="34" charset="-120"/>
               </a:rPr>
               <a:t>CI/CD integration: gate results posted as GitHub Check Runs and commit statuses</a:t>
+            </a:r>
+            <a:endParaRPr lang="en-US" sz="1400" dirty="0"/>
+          </a:p>
+          <a:p>
+            <a:pPr marL="342900" indent="-342900">
+              <a:spcAft>
+                <a:spcPts val="600"/>
+              </a:spcAft>
+              <a:buSzPct val="100000"/>
+              <a:buChar char="•"/>
+            </a:pPr>
+            <a:r>
+              <a:rPr lang="en-US" sz="1400" dirty="0">
+                <a:solidFill>
+                  <a:srgbClr val="94A3B8"/>
+                </a:solidFill>
+                <a:latin typeface="Arial" pitchFamily="34" charset="0"/>
+                <a:ea typeface="Arial" pitchFamily="34" charset="-122"/>
+                <a:cs typeface="Arial" pitchFamily="34" charset="-120"/>
+              </a:rPr>
+              <a:t>PR gate-summary comments with collapsible blocking/warning/passed sections</a:t>
             </a:r>
             <a:endParaRPr lang="en-US" sz="1400" dirty="0"/>
           </a:p>
@@ -9436,7 +9478,7 @@
                 <a:ea typeface="Arial" pitchFamily="34" charset="-122"/>
                 <a:cs typeface="Arial" pitchFamily="34" charset="-120"/>
               </a:rPr>
-              <a:t>18 pages organized into 4 navigation groups</a:t>
+              <a:t>20 pages organized into 4 navigation groups</a:t>
             </a:r>
             <a:endParaRPr lang="en-US" sz="1600" dirty="0"/>
           </a:p>
@@ -11876,7 +11918,283 @@
                           <a:ea typeface="Arial" pitchFamily="34" charset="-122"/>
                           <a:cs typeface="Arial" pitchFamily="34" charset="-120"/>
                         </a:rPr>
-                        <a:t>SHAP, Prophet forecasting, RUM summary, CrUX snapshots, capacity planning</a:t>
+                        <a:t>SHAP, Prophet forecasting, RUM, CrUX, capacity, mobile-vs-desktop, multi-geo</a:t>
+                      </a:r>
+                      <a:endParaRPr lang="en-US" sz="1100" dirty="0">
+                        <a:latin typeface="Arial" charset="0"/>
+                        <a:ea typeface="Arial" charset="0"/>
+                        <a:cs typeface="Arial" charset="0"/>
+                      </a:endParaRPr>
+                    </a:p>
+                  </a:txBody>
+                  <a:tcPr marL="91440" marR="91440" marT="45720" marB="45720">
+                    <a:lnL w="6350" cap="flat" cmpd="sng" algn="ctr">
+                      <a:solidFill>
+                        <a:srgbClr val="334155"/>
+                      </a:solidFill>
+                      <a:prstDash val="solid"/>
+                      <a:round/>
+                      <a:headEnd type="none" w="med" len="med"/>
+                      <a:tailEnd type="none" w="med" len="med"/>
+                    </a:lnL>
+                    <a:lnR w="6350" cap="flat" cmpd="sng" algn="ctr">
+                      <a:solidFill>
+                        <a:srgbClr val="334155"/>
+                      </a:solidFill>
+                      <a:prstDash val="solid"/>
+                      <a:round/>
+                      <a:headEnd type="none" w="med" len="med"/>
+                      <a:tailEnd type="none" w="med" len="med"/>
+                    </a:lnR>
+                    <a:lnT w="6350" cap="flat" cmpd="sng" algn="ctr">
+                      <a:solidFill>
+                        <a:srgbClr val="334155"/>
+                      </a:solidFill>
+                      <a:prstDash val="solid"/>
+                      <a:round/>
+                      <a:headEnd type="none" w="med" len="med"/>
+                      <a:tailEnd type="none" w="med" len="med"/>
+                    </a:lnT>
+                    <a:lnB w="6350" cap="flat" cmpd="sng" algn="ctr">
+                      <a:solidFill>
+                        <a:srgbClr val="334155"/>
+                      </a:solidFill>
+                      <a:prstDash val="solid"/>
+                      <a:round/>
+                      <a:headEnd type="none" w="med" len="med"/>
+                      <a:tailEnd type="none" w="med" len="med"/>
+                    </a:lnB>
+                    <a:solidFill>
+                      <a:srgbClr val="1E293B"/>
+                    </a:solidFill>
+                  </a:tcPr>
+                </a:tc>
+              </a:tr>
+              <a:tr h="0">
+                <a:tc>
+                  <a:txBody>
+                    <a:bodyPr/>
+                    <a:lstStyle/>
+                    <a:p>
+                      <a:pPr indent="0" marL="0">
+                        <a:buNone/>
+                      </a:pPr>
+                      <a:r>
+                        <a:rPr lang="en-US" sz="1100" dirty="0">
+                          <a:solidFill>
+                            <a:srgbClr val="94A3B8"/>
+                          </a:solidFill>
+                          <a:latin typeface="Arial" pitchFamily="34" charset="0"/>
+                          <a:ea typeface="Arial" pitchFamily="34" charset="-122"/>
+                          <a:cs typeface="Arial" pitchFamily="34" charset="-120"/>
+                        </a:rPr>
+                        <a:t>Investigation</a:t>
+                      </a:r>
+                      <a:endParaRPr lang="en-US" sz="1100" dirty="0">
+                        <a:latin typeface="Arial" charset="0"/>
+                        <a:ea typeface="Arial" charset="0"/>
+                        <a:cs typeface="Arial" charset="0"/>
+                      </a:endParaRPr>
+                    </a:p>
+                  </a:txBody>
+                  <a:tcPr marL="91440" marR="91440" marT="45720" marB="45720">
+                    <a:lnL w="6350" cap="flat" cmpd="sng" algn="ctr">
+                      <a:solidFill>
+                        <a:srgbClr val="334155"/>
+                      </a:solidFill>
+                      <a:prstDash val="solid"/>
+                      <a:round/>
+                      <a:headEnd type="none" w="med" len="med"/>
+                      <a:tailEnd type="none" w="med" len="med"/>
+                    </a:lnL>
+                    <a:lnR w="6350" cap="flat" cmpd="sng" algn="ctr">
+                      <a:solidFill>
+                        <a:srgbClr val="334155"/>
+                      </a:solidFill>
+                      <a:prstDash val="solid"/>
+                      <a:round/>
+                      <a:headEnd type="none" w="med" len="med"/>
+                      <a:tailEnd type="none" w="med" len="med"/>
+                    </a:lnR>
+                    <a:lnT w="6350" cap="flat" cmpd="sng" algn="ctr">
+                      <a:solidFill>
+                        <a:srgbClr val="334155"/>
+                      </a:solidFill>
+                      <a:prstDash val="solid"/>
+                      <a:round/>
+                      <a:headEnd type="none" w="med" len="med"/>
+                      <a:tailEnd type="none" w="med" len="med"/>
+                    </a:lnT>
+                    <a:lnB w="6350" cap="flat" cmpd="sng" algn="ctr">
+                      <a:solidFill>
+                        <a:srgbClr val="334155"/>
+                      </a:solidFill>
+                      <a:prstDash val="solid"/>
+                      <a:round/>
+                      <a:headEnd type="none" w="med" len="med"/>
+                      <a:tailEnd type="none" w="med" len="med"/>
+                    </a:lnB>
+                    <a:solidFill>
+                      <a:srgbClr val="1E293B"/>
+                    </a:solidFill>
+                  </a:tcPr>
+                </a:tc>
+                <a:tc>
+                  <a:txBody>
+                    <a:bodyPr/>
+                    <a:lstStyle/>
+                    <a:p>
+                      <a:pPr indent="0" marL="0">
+                        <a:buNone/>
+                      </a:pPr>
+                      <a:r>
+                        <a:rPr lang="en-US" sz="1100" dirty="0">
+                          <a:solidFill>
+                            <a:srgbClr val="94A3B8"/>
+                          </a:solidFill>
+                          <a:latin typeface="Arial" pitchFamily="34" charset="0"/>
+                          <a:ea typeface="Arial" pitchFamily="34" charset="-122"/>
+                          <a:cs typeface="Arial" pitchFamily="34" charset="-120"/>
+                        </a:rPr>
+                        <a:t>Regression timeline, attribution panel, gate status, baseline comparison</a:t>
+                      </a:r>
+                      <a:endParaRPr lang="en-US" sz="1100" dirty="0">
+                        <a:latin typeface="Arial" charset="0"/>
+                        <a:ea typeface="Arial" charset="0"/>
+                        <a:cs typeface="Arial" charset="0"/>
+                      </a:endParaRPr>
+                    </a:p>
+                  </a:txBody>
+                  <a:tcPr marL="91440" marR="91440" marT="45720" marB="45720">
+                    <a:lnL w="6350" cap="flat" cmpd="sng" algn="ctr">
+                      <a:solidFill>
+                        <a:srgbClr val="334155"/>
+                      </a:solidFill>
+                      <a:prstDash val="solid"/>
+                      <a:round/>
+                      <a:headEnd type="none" w="med" len="med"/>
+                      <a:tailEnd type="none" w="med" len="med"/>
+                    </a:lnL>
+                    <a:lnR w="6350" cap="flat" cmpd="sng" algn="ctr">
+                      <a:solidFill>
+                        <a:srgbClr val="334155"/>
+                      </a:solidFill>
+                      <a:prstDash val="solid"/>
+                      <a:round/>
+                      <a:headEnd type="none" w="med" len="med"/>
+                      <a:tailEnd type="none" w="med" len="med"/>
+                    </a:lnR>
+                    <a:lnT w="6350" cap="flat" cmpd="sng" algn="ctr">
+                      <a:solidFill>
+                        <a:srgbClr val="334155"/>
+                      </a:solidFill>
+                      <a:prstDash val="solid"/>
+                      <a:round/>
+                      <a:headEnd type="none" w="med" len="med"/>
+                      <a:tailEnd type="none" w="med" len="med"/>
+                    </a:lnT>
+                    <a:lnB w="6350" cap="flat" cmpd="sng" algn="ctr">
+                      <a:solidFill>
+                        <a:srgbClr val="334155"/>
+                      </a:solidFill>
+                      <a:prstDash val="solid"/>
+                      <a:round/>
+                      <a:headEnd type="none" w="med" len="med"/>
+                      <a:tailEnd type="none" w="med" len="med"/>
+                    </a:lnB>
+                    <a:solidFill>
+                      <a:srgbClr val="1E293B"/>
+                    </a:solidFill>
+                  </a:tcPr>
+                </a:tc>
+              </a:tr>
+              <a:tr h="0">
+                <a:tc>
+                  <a:txBody>
+                    <a:bodyPr/>
+                    <a:lstStyle/>
+                    <a:p>
+                      <a:pPr indent="0" marL="0">
+                        <a:buNone/>
+                      </a:pPr>
+                      <a:r>
+                        <a:rPr lang="en-US" sz="1100" dirty="0">
+                          <a:solidFill>
+                            <a:srgbClr val="94A3B8"/>
+                          </a:solidFill>
+                          <a:latin typeface="Arial" pitchFamily="34" charset="0"/>
+                          <a:ea typeface="Arial" pitchFamily="34" charset="-122"/>
+                          <a:cs typeface="Arial" pitchFamily="34" charset="-120"/>
+                        </a:rPr>
+                        <a:t>Audit</a:t>
+                      </a:r>
+                      <a:endParaRPr lang="en-US" sz="1100" dirty="0">
+                        <a:latin typeface="Arial" charset="0"/>
+                        <a:ea typeface="Arial" charset="0"/>
+                        <a:cs typeface="Arial" charset="0"/>
+                      </a:endParaRPr>
+                    </a:p>
+                  </a:txBody>
+                  <a:tcPr marL="91440" marR="91440" marT="45720" marB="45720">
+                    <a:lnL w="6350" cap="flat" cmpd="sng" algn="ctr">
+                      <a:solidFill>
+                        <a:srgbClr val="334155"/>
+                      </a:solidFill>
+                      <a:prstDash val="solid"/>
+                      <a:round/>
+                      <a:headEnd type="none" w="med" len="med"/>
+                      <a:tailEnd type="none" w="med" len="med"/>
+                    </a:lnL>
+                    <a:lnR w="6350" cap="flat" cmpd="sng" algn="ctr">
+                      <a:solidFill>
+                        <a:srgbClr val="334155"/>
+                      </a:solidFill>
+                      <a:prstDash val="solid"/>
+                      <a:round/>
+                      <a:headEnd type="none" w="med" len="med"/>
+                      <a:tailEnd type="none" w="med" len="med"/>
+                    </a:lnR>
+                    <a:lnT w="6350" cap="flat" cmpd="sng" algn="ctr">
+                      <a:solidFill>
+                        <a:srgbClr val="334155"/>
+                      </a:solidFill>
+                      <a:prstDash val="solid"/>
+                      <a:round/>
+                      <a:headEnd type="none" w="med" len="med"/>
+                      <a:tailEnd type="none" w="med" len="med"/>
+                    </a:lnT>
+                    <a:lnB w="6350" cap="flat" cmpd="sng" algn="ctr">
+                      <a:solidFill>
+                        <a:srgbClr val="334155"/>
+                      </a:solidFill>
+                      <a:prstDash val="solid"/>
+                      <a:round/>
+                      <a:headEnd type="none" w="med" len="med"/>
+                      <a:tailEnd type="none" w="med" len="med"/>
+                    </a:lnB>
+                    <a:solidFill>
+                      <a:srgbClr val="1E293B"/>
+                    </a:solidFill>
+                  </a:tcPr>
+                </a:tc>
+                <a:tc>
+                  <a:txBody>
+                    <a:bodyPr/>
+                    <a:lstStyle/>
+                    <a:p>
+                      <a:pPr indent="0" marL="0">
+                        <a:buNone/>
+                      </a:pPr>
+                      <a:r>
+                        <a:rPr lang="en-US" sz="1100" dirty="0">
+                          <a:solidFill>
+                            <a:srgbClr val="94A3B8"/>
+                          </a:solidFill>
+                          <a:latin typeface="Arial" pitchFamily="34" charset="0"/>
+                          <a:ea typeface="Arial" pitchFamily="34" charset="-122"/>
+                          <a:cs typeface="Arial" pitchFamily="34" charset="-120"/>
+                        </a:rPr>
+                        <a:t>Interactive Appendix C checklist with auto-evaluation and KPI reference guide</a:t>
                       </a:r>
                       <a:endParaRPr lang="en-US" sz="1100" dirty="0">
                         <a:latin typeface="Arial" charset="0"/>
@@ -12037,7 +12355,7 @@
                 <a:ea typeface="Arial" pitchFamily="34" charset="-122"/>
                 <a:cs typeface="Arial" pitchFamily="34" charset="-120"/>
               </a:rPr>
-              <a:t>Authentication &amp; Access Control</a:t>
+              <a:t>Authentication &amp; Security</a:t>
             </a:r>
             <a:endParaRPr lang="en-US" sz="3600" dirty="0"/>
           </a:p>
@@ -12076,7 +12394,7 @@
                 <a:ea typeface="Arial" pitchFamily="34" charset="-122"/>
                 <a:cs typeface="Arial" pitchFamily="34" charset="-120"/>
               </a:rPr>
-              <a:t>Password-based auth with role-based access</a:t>
+              <a:t>JWT auth with security hardening</a:t>
             </a:r>
             <a:endParaRPr lang="en-US" sz="1600" dirty="0"/>
           </a:p>
@@ -12167,7 +12485,7 @@
                 <a:ea typeface="Arial" pitchFamily="34" charset="-122"/>
                 <a:cs typeface="Arial" pitchFamily="34" charset="-120"/>
               </a:rPr>
-              <a:t>Authentication</a:t>
+              <a:t>Authentication &amp; Security</a:t>
             </a:r>
             <a:endParaRPr lang="en-US" sz="2400" dirty="0"/>
           </a:p>
@@ -12230,7 +12548,7 @@
                 <a:ea typeface="Arial" pitchFamily="34" charset="-122"/>
                 <a:cs typeface="Arial" pitchFamily="34" charset="-120"/>
               </a:rPr>
-              <a:t>Password-based login with session persistence via localStorage</a:t>
+              <a:t>JWT-based authentication — global AuthGuard on all API endpoints</a:t>
             </a:r>
             <a:endParaRPr lang="en-US" sz="1400" dirty="0"/>
           </a:p>
@@ -12272,7 +12590,7 @@
                 <a:ea typeface="Arial" pitchFamily="34" charset="-122"/>
                 <a:cs typeface="Arial" pitchFamily="34" charset="-120"/>
               </a:rPr>
-              <a:t>Forgot/reset password flow (reset tokens shown in dev mode)</a:t>
+              <a:t>Rate limiting: auth endpoints 5 req/60s, session-upgrade 2 req/60s</a:t>
             </a:r>
             <a:endParaRPr lang="en-US" sz="1400" dirty="0"/>
           </a:p>
@@ -12293,7 +12611,7 @@
                 <a:ea typeface="Arial" pitchFamily="34" charset="-122"/>
                 <a:cs typeface="Arial" pitchFamily="34" charset="-120"/>
               </a:rPr>
-              <a:t>5 seed accounts: admin, editor (×2), viewer (×2)</a:t>
+              <a:t>Helmet security headers (X-Frame-Options, CSP, HSTS)</a:t>
             </a:r>
             <a:endParaRPr lang="en-US" sz="1400" dirty="0"/>
           </a:p>
@@ -12314,7 +12632,112 @@
                 <a:ea typeface="Arial" pitchFamily="34" charset="-122"/>
                 <a:cs typeface="Arial" pitchFamily="34" charset="-120"/>
               </a:rPr>
-              <a:t>Admin can switch between user accounts via sidebar dropdown</a:t>
+              <a:t>Token encryption: GitHub tokens encrypted at rest with AES-256-GCM</a:t>
+            </a:r>
+            <a:endParaRPr lang="en-US" sz="1400" dirty="0"/>
+          </a:p>
+          <a:p>
+            <a:pPr marL="342900" indent="-342900">
+              <a:spcAft>
+                <a:spcPts val="600"/>
+              </a:spcAft>
+              <a:buSzPct val="100000"/>
+              <a:buChar char="•"/>
+            </a:pPr>
+            <a:r>
+              <a:rPr lang="en-US" sz="1400" dirty="0">
+                <a:solidFill>
+                  <a:srgbClr val="94A3B8"/>
+                </a:solidFill>
+                <a:latin typeface="Arial" pitchFamily="34" charset="0"/>
+                <a:ea typeface="Arial" pitchFamily="34" charset="-122"/>
+                <a:cs typeface="Arial" pitchFamily="34" charset="-120"/>
+              </a:rPr>
+              <a:t>Startup warnings when JWT_SECRET or TOKEN_ENCRYPTION_KEY use insecure defaults</a:t>
+            </a:r>
+            <a:endParaRPr lang="en-US" sz="1400" dirty="0"/>
+          </a:p>
+          <a:p>
+            <a:pPr marL="342900" indent="-342900">
+              <a:spcAft>
+                <a:spcPts val="600"/>
+              </a:spcAft>
+              <a:buSzPct val="100000"/>
+              <a:buChar char="•"/>
+            </a:pPr>
+            <a:r>
+              <a:rPr lang="en-US" sz="1400" dirty="0">
+                <a:solidFill>
+                  <a:srgbClr val="94A3B8"/>
+                </a:solidFill>
+                <a:latin typeface="Arial" pitchFamily="34" charset="0"/>
+                <a:ea typeface="Arial" pitchFamily="34" charset="-122"/>
+                <a:cs typeface="Arial" pitchFamily="34" charset="-120"/>
+              </a:rPr>
+              <a:t>Reset tokens suppressed in production (NODE_ENV=production)</a:t>
+            </a:r>
+            <a:endParaRPr lang="en-US" sz="1400" dirty="0"/>
+          </a:p>
+          <a:p>
+            <a:pPr marL="342900" indent="-342900">
+              <a:spcAft>
+                <a:spcPts val="600"/>
+              </a:spcAft>
+              <a:buSzPct val="100000"/>
+              <a:buChar char="•"/>
+            </a:pPr>
+            <a:r>
+              <a:rPr lang="en-US" sz="1400" dirty="0">
+                <a:solidFill>
+                  <a:srgbClr val="94A3B8"/>
+                </a:solidFill>
+                <a:latin typeface="Arial" pitchFamily="34" charset="0"/>
+                <a:ea typeface="Arial" pitchFamily="34" charset="-122"/>
+                <a:cs typeface="Arial" pitchFamily="34" charset="-120"/>
+              </a:rPr>
+              <a:t>Unified login errors — never reveal whether an account exists</a:t>
+            </a:r>
+            <a:endParaRPr lang="en-US" sz="1400" dirty="0"/>
+          </a:p>
+          <a:p>
+            <a:pPr marL="342900" indent="-342900">
+              <a:spcAft>
+                <a:spcPts val="600"/>
+              </a:spcAft>
+              <a:buSzPct val="100000"/>
+              <a:buChar char="•"/>
+            </a:pPr>
+            <a:r>
+              <a:rPr lang="en-US" sz="1400" dirty="0">
+                <a:solidFill>
+                  <a:srgbClr val="94A3B8"/>
+                </a:solidFill>
+                <a:latin typeface="Arial" pitchFamily="34" charset="0"/>
+                <a:ea typeface="Arial" pitchFamily="34" charset="-122"/>
+                <a:cs typeface="Arial" pitchFamily="34" charset="-120"/>
+              </a:rPr>
+              <a:t>Parameterized SQL throughout — no string interpolation</a:t>
+            </a:r>
+            <a:endParaRPr lang="en-US" sz="1400" dirty="0"/>
+          </a:p>
+          <a:p>
+            <a:pPr marL="342900" indent="-342900">
+              <a:spcAft>
+                <a:spcPts val="600"/>
+              </a:spcAft>
+              <a:buSzPct val="100000"/>
+              <a:buChar char="•"/>
+            </a:pPr>
+            <a:r>
+              <a:rPr lang="en-US" sz="1400" dirty="0">
+                <a:solidFill>
+                  <a:srgbClr val="94A3B8"/>
+                </a:solidFill>
+                <a:latin typeface="Arial" pitchFamily="34" charset="0"/>
+                <a:ea typeface="Arial" pitchFamily="34" charset="-122"/>
+                <a:cs typeface="Arial" pitchFamily="34" charset="-120"/>
+              </a:rPr>
+              <a:t>UUID validation on session-upgrade to prevent enumeration</a:t>
             </a:r>
             <a:endParaRPr lang="en-US" sz="1400" dirty="0"/>
           </a:p>
@@ -15175,7 +15598,7 @@
                 <a:ea typeface="Arial" pitchFamily="34" charset="-122"/>
                 <a:cs typeface="Arial" pitchFamily="34" charset="-120"/>
               </a:rPr>
-              <a:t>API: Jest unit tests — 56 spec files covering controllers, services, guards</a:t>
+              <a:t>API: Jest — 87 suites, 1050 tests (controllers, services, guards, security)</a:t>
             </a:r>
             <a:endParaRPr lang="en-US" sz="1400" dirty="0"/>
           </a:p>
@@ -15196,7 +15619,7 @@
                 <a:ea typeface="Arial" pitchFamily="34" charset="-122"/>
                 <a:cs typeface="Arial" pitchFamily="34" charset="-120"/>
               </a:rPr>
-              <a:t>Shared: Vitest — 135 tests for validators and shared utilities</a:t>
+              <a:t>Dashboard: Jest — 24 suites, 771 tests (page logic, anomalies, trends, auth)</a:t>
             </a:r>
             <a:endParaRPr lang="en-US" sz="1400" dirty="0"/>
           </a:p>
@@ -15217,7 +15640,7 @@
                 <a:ea typeface="Arial" pitchFamily="34" charset="-122"/>
                 <a:cs typeface="Arial" pitchFamily="34" charset="-120"/>
               </a:rPr>
-              <a:t>Worker: Vitest — 52 tests for engine, stats, and runner logic</a:t>
+              <a:t>Worker: Vitest — 10 suites, 205 tests (engine, stats, adapters, journey)</a:t>
             </a:r>
             <a:endParaRPr lang="en-US" sz="1400" dirty="0"/>
           </a:p>
@@ -15238,7 +15661,7 @@
                 <a:ea typeface="Arial" pitchFamily="34" charset="-122"/>
                 <a:cs typeface="Arial" pitchFamily="34" charset="-120"/>
               </a:rPr>
-              <a:t>Dashboard: Vitest — 8 test suites, 173 tests for component logic</a:t>
+              <a:t>Shared: Vitest — 1 suite, 135 tests (validators, shared utilities)</a:t>
             </a:r>
             <a:endParaRPr lang="en-US" sz="1400" dirty="0"/>
           </a:p>
@@ -15259,7 +15682,7 @@
                 <a:ea typeface="Arial" pitchFamily="34" charset="-122"/>
                 <a:cs typeface="Arial" pitchFamily="34" charset="-120"/>
               </a:rPr>
-              <a:t>CI: GitHub Actions runs all tests, linting, and builds on every push/PR</a:t>
+              <a:t>Total: 122 suites, 2161 tests across all packages</a:t>
             </a:r>
             <a:endParaRPr lang="en-US" sz="1400" dirty="0"/>
           </a:p>
@@ -15280,7 +15703,7 @@
                 <a:ea typeface="Arial" pitchFamily="34" charset="-122"/>
                 <a:cs typeface="Arial" pitchFamily="34" charset="-120"/>
               </a:rPr>
-              <a:t>Security audit completed: SQL injection, auth bypass, XSS, CORS, input validation</a:t>
+              <a:t>CI: GitHub Actions — test → lint → build → DB migration verification</a:t>
             </a:r>
             <a:endParaRPr lang="en-US" sz="1400" dirty="0"/>
           </a:p>
@@ -15301,7 +15724,7 @@
                 <a:ea typeface="Arial" pitchFamily="34" charset="-122"/>
                 <a:cs typeface="Arial" pitchFamily="34" charset="-120"/>
               </a:rPr>
-              <a:t>Regression tests added for cron parser, admin role validation, URI encoding</a:t>
+              <a:t>Security audit: session-upgrade hardened, startup warnings, UUID validation, parameterized SQL</a:t>
             </a:r>
             <a:endParaRPr lang="en-US" sz="1400" dirty="0"/>
           </a:p>
@@ -18503,7 +18926,7 @@
                 <a:ea typeface="Arial" pitchFamily="34" charset="-122"/>
                 <a:cs typeface="Arial" pitchFamily="34" charset="-120"/>
               </a:rPr>
-              <a:t>github.com/jj-shen99/ui_performance_testing_and_analysis</a:t>
+              <a:t>github.com/jj-shen99/uxperf</a:t>
             </a:r>
             <a:endParaRPr lang="en-US" sz="1300" dirty="0"/>
           </a:p>
@@ -21442,7 +21865,7 @@
                           <a:ea typeface="Arial" pitchFamily="34" charset="-122"/>
                           <a:cs typeface="Arial" pitchFamily="34" charset="-120"/>
                         </a:rPr>
-                        <a:t>PostgreSQL 16 (9 migration sets, 18 migration files)</a:t>
+                        <a:t>PostgreSQL 16 (11 migration sets)</a:t>
                       </a:r>
                       <a:endParaRPr lang="en-US" sz="1100" dirty="0">
                         <a:latin typeface="Arial" charset="0"/>
@@ -21580,7 +22003,7 @@
                           <a:ea typeface="Arial" pitchFamily="34" charset="-122"/>
                           <a:cs typeface="Arial" pitchFamily="34" charset="-120"/>
                         </a:rPr>
-                        <a:t>Playwright + Lighthouse (built-in), k6 Browser (built-in), WebPageTest (opt-in)</a:t>
+                        <a:t>Playwright + Lighthouse, k6 Browser, WebPageTest, sitespeed.io</a:t>
                       </a:r>
                       <a:endParaRPr lang="en-US" sz="1100" dirty="0">
                         <a:latin typeface="Arial" charset="0"/>
